--- a/tools/rcn-table-intro.pptx
+++ b/tools/rcn-table-intro.pptx
@@ -20,6 +20,8 @@
     <p:sldId id="268" r:id="rId19"/>
     <p:sldId id="269" r:id="rId20"/>
     <p:sldId id="270" r:id="rId21"/>
+    <p:sldId id="271" r:id="rId22"/>
+    <p:sldId id="272" r:id="rId23"/>
   </p:sldIdLst>
   <p:sldSz cx="12191695" cy="6858000" type="screen4x3"/>
   <p:notesSz cx="6858000" cy="9144000"/>
@@ -5926,7 +5928,7 @@
             <a:avLst/>
           </a:prstGeom>
           <a:solidFill>
-            <a:srgbClr val="0F766E"/>
+            <a:srgbClr val="166A34"/>
           </a:solidFill>
           <a:ln>
             <a:noFill/>
@@ -5983,21 +5985,55 @@
                   <a:srgbClr val="FFFFFF"/>
                 </a:solidFill>
               </a:rPr>
-              <a:t>Taking it with you</a:t>
-            </a:r>
-          </a:p>
-        </p:txBody>
-      </p:sp>
-      <p:sp>
-        <p:nvSpPr>
-          <p:cNvPr id="5" name="Rectangle 4"/>
+              <a:t>The same rows, on the ground</a:t>
+            </a:r>
+          </a:p>
+        </p:txBody>
+      </p:sp>
+      <p:sp>
+        <p:nvSpPr>
+          <p:cNvPr id="5" name="TextBox 4"/>
+          <p:cNvSpPr txBox="1"/>
+          <p:nvPr/>
+        </p:nvSpPr>
+        <p:spPr>
+          <a:xfrm>
+            <a:off x="457200" y="1325880"/>
+            <a:ext cx="11247120" cy="640080"/>
+          </a:xfrm>
+          <a:prstGeom prst="rect">
+            <a:avLst/>
+          </a:prstGeom>
+          <a:noFill/>
+        </p:spPr>
+        <p:txBody>
+          <a:bodyPr wrap="square">
+            <a:spAutoFit/>
+          </a:bodyPr>
+          <a:lstStyle/>
+          <a:p>
+            <a:pPr algn="l"/>
+            <a:r>
+              <a:rPr sz="1700" b="0" i="0">
+                <a:solidFill>
+                  <a:srgbClr val="334155"/>
+                </a:solidFill>
+              </a:rPr>
+              <a:t>Select rows and press Map. Unlike Neighbourhood this does not need exactly one row — a map of many things is the normal case.</a:t>
+            </a:r>
+          </a:p>
+        </p:txBody>
+      </p:sp>
+      <p:sp>
+        <p:nvSpPr>
+          <p:cNvPr id="6" name="Rectangle 5"/>
           <p:cNvSpPr/>
           <p:nvPr/>
         </p:nvSpPr>
         <p:spPr>
           <a:xfrm>
-            <a:off x="457200" y="1463040"/>
-            <a:ext cx="5486400" cy="2148840"/>
+            <a:off x="457200" y="2057400"/>
+            <a:ext cx="5486400" cy="1737360"/>
           </a:xfrm>
           <a:prstGeom prst="rect">
             <a:avLst/>
@@ -6033,13 +6069,13 @@
       </p:sp>
       <p:sp>
         <p:nvSpPr>
-          <p:cNvPr id="6" name="TextBox 5"/>
-          <p:cNvSpPr txBox="1"/>
-          <p:nvPr/>
-        </p:nvSpPr>
-        <p:spPr>
-          <a:xfrm>
-            <a:off x="685800" y="1600200"/>
+          <p:cNvPr id="7" name="TextBox 6"/>
+          <p:cNvSpPr txBox="1"/>
+          <p:nvPr/>
+        </p:nvSpPr>
+        <p:spPr>
+          <a:xfrm>
+            <a:off x="685800" y="2194560"/>
             <a:ext cx="5029200" cy="411480"/>
           </a:xfrm>
           <a:prstGeom prst="rect">
@@ -6057,24 +6093,24 @@
             <a:r>
               <a:rPr sz="1500" b="1" i="0">
                 <a:solidFill>
-                  <a:srgbClr val="0F766E"/>
-                </a:solidFill>
-              </a:rPr>
-              <a:t>CSV</a:t>
-            </a:r>
-          </a:p>
-        </p:txBody>
-      </p:sp>
-      <p:sp>
-        <p:nvSpPr>
-          <p:cNvPr id="7" name="TextBox 6"/>
-          <p:cNvSpPr txBox="1"/>
-          <p:nvPr/>
-        </p:nvSpPr>
-        <p:spPr>
-          <a:xfrm>
-            <a:off x="685800" y="2084832"/>
-            <a:ext cx="5029200" cy="1371600"/>
+                  <a:srgbClr val="166A34"/>
+                </a:solidFill>
+              </a:rPr>
+              <a:t>Points stay points</a:t>
+            </a:r>
+          </a:p>
+        </p:txBody>
+      </p:sp>
+      <p:sp>
+        <p:nvSpPr>
+          <p:cNvPr id="8" name="TextBox 7"/>
+          <p:cNvSpPr txBox="1"/>
+          <p:nvPr/>
+        </p:nvSpPr>
+        <p:spPr>
+          <a:xfrm>
+            <a:off x="685800" y="2679192"/>
+            <a:ext cx="5029200" cy="960119"/>
           </a:xfrm>
           <a:prstGeom prst="rect">
             <a:avLst/>
@@ -6093,21 +6129,21 @@
                   <a:srgbClr val="334155"/>
                 </a:solidFill>
               </a:rPr>
-              <a:t>Downloads what you can currently see — after filtering, in the order you sorted, with only the columns showing. Opens in any spreadsheet.</a:t>
-            </a:r>
-          </a:p>
-        </p:txBody>
-      </p:sp>
-      <p:sp>
-        <p:nvSpPr>
-          <p:cNvPr id="8" name="Rectangle 7"/>
+              <a:t>A person, a building, an NDC. Selected rows are larger and amber so you can see what you brought.</a:t>
+            </a:r>
+          </a:p>
+        </p:txBody>
+      </p:sp>
+      <p:sp>
+        <p:nvSpPr>
+          <p:cNvPr id="9" name="Rectangle 8"/>
           <p:cNvSpPr/>
           <p:nvPr/>
         </p:nvSpPr>
         <p:spPr>
           <a:xfrm>
-            <a:off x="6217920" y="1463040"/>
-            <a:ext cx="5486400" cy="2148840"/>
+            <a:off x="6217920" y="2057400"/>
+            <a:ext cx="5486400" cy="1737360"/>
           </a:xfrm>
           <a:prstGeom prst="rect">
             <a:avLst/>
@@ -6143,13 +6179,13 @@
       </p:sp>
       <p:sp>
         <p:nvSpPr>
-          <p:cNvPr id="9" name="TextBox 8"/>
-          <p:cNvSpPr txBox="1"/>
-          <p:nvPr/>
-        </p:nvSpPr>
-        <p:spPr>
-          <a:xfrm>
-            <a:off x="6446520" y="1600200"/>
+          <p:cNvPr id="10" name="TextBox 9"/>
+          <p:cNvSpPr txBox="1"/>
+          <p:nvPr/>
+        </p:nvSpPr>
+        <p:spPr>
+          <a:xfrm>
+            <a:off x="6446520" y="2194560"/>
             <a:ext cx="5029200" cy="411480"/>
           </a:xfrm>
           <a:prstGeom prst="rect">
@@ -6167,24 +6203,24 @@
             <a:r>
               <a:rPr sz="1500" b="1" i="0">
                 <a:solidFill>
-                  <a:srgbClr val="0F766E"/>
-                </a:solidFill>
-              </a:rPr>
-              <a:t>Send to the page</a:t>
-            </a:r>
-          </a:p>
-        </p:txBody>
-      </p:sp>
-      <p:sp>
-        <p:nvSpPr>
-          <p:cNvPr id="10" name="TextBox 9"/>
-          <p:cNvSpPr txBox="1"/>
-          <p:nvPr/>
-        </p:nvSpPr>
-        <p:spPr>
-          <a:xfrm>
-            <a:off x="6446520" y="2084832"/>
-            <a:ext cx="5029200" cy="1371600"/>
+                  <a:srgbClr val="166A34"/>
+                </a:solidFill>
+              </a:rPr>
+              <a:t>Areas are drawn as areas</a:t>
+            </a:r>
+          </a:p>
+        </p:txBody>
+      </p:sp>
+      <p:sp>
+        <p:nvSpPr>
+          <p:cNvPr id="11" name="TextBox 10"/>
+          <p:cNvSpPr txBox="1"/>
+          <p:nvPr/>
+        </p:nvSpPr>
+        <p:spPr>
+          <a:xfrm>
+            <a:off x="6446520" y="2679192"/>
+            <a:ext cx="5029200" cy="960119"/>
           </a:xfrm>
           <a:prstGeom prst="rect">
             <a:avLst/>
@@ -6203,21 +6239,21 @@
                   <a:srgbClr val="334155"/>
                 </a:solidFill>
               </a:rPr>
-              <a:t>Puts the current view back on the wiki page as something others can read and follow. Carries up to 200 rows, and says the true total.</a:t>
-            </a:r>
-          </a:p>
-        </p:txBody>
-      </p:sp>
-      <p:sp>
-        <p:nvSpPr>
-          <p:cNvPr id="11" name="Rectangle 10"/>
+              <a:t>A watershed is a shape. Shrinking it to a dot throws away the only thing that made it a place.</a:t>
+            </a:r>
+          </a:p>
+        </p:txBody>
+      </p:sp>
+      <p:sp>
+        <p:nvSpPr>
+          <p:cNvPr id="12" name="Rectangle 11"/>
           <p:cNvSpPr/>
           <p:nvPr/>
         </p:nvSpPr>
         <p:spPr>
           <a:xfrm>
-            <a:off x="457200" y="3886200"/>
-            <a:ext cx="5486400" cy="2148840"/>
+            <a:off x="457200" y="4069079"/>
+            <a:ext cx="5486400" cy="1737360"/>
           </a:xfrm>
           <a:prstGeom prst="rect">
             <a:avLst/>
@@ -6253,13 +6289,13 @@
       </p:sp>
       <p:sp>
         <p:nvSpPr>
-          <p:cNvPr id="12" name="TextBox 11"/>
-          <p:cNvSpPr txBox="1"/>
-          <p:nvPr/>
-        </p:nvSpPr>
-        <p:spPr>
-          <a:xfrm>
-            <a:off x="685800" y="4023360"/>
+          <p:cNvPr id="13" name="TextBox 12"/>
+          <p:cNvSpPr txBox="1"/>
+          <p:nvPr/>
+        </p:nvSpPr>
+        <p:spPr>
+          <a:xfrm>
+            <a:off x="685800" y="4206240"/>
             <a:ext cx="5029200" cy="411480"/>
           </a:xfrm>
           <a:prstGeom prst="rect">
@@ -6277,24 +6313,24 @@
             <a:r>
               <a:rPr sz="1500" b="1" i="0">
                 <a:solidFill>
-                  <a:srgbClr val="0F766E"/>
-                </a:solidFill>
-              </a:rPr>
-              <a:t>The address bar</a:t>
-            </a:r>
-          </a:p>
-        </p:txBody>
-      </p:sp>
-      <p:sp>
-        <p:nvSpPr>
-          <p:cNvPr id="13" name="TextBox 12"/>
-          <p:cNvSpPr txBox="1"/>
-          <p:nvPr/>
-        </p:nvSpPr>
-        <p:spPr>
-          <a:xfrm>
-            <a:off x="685800" y="4507992"/>
-            <a:ext cx="5029200" cy="1371600"/>
+                  <a:srgbClr val="166A34"/>
+                </a:solidFill>
+              </a:rPr>
+              <a:t>The links come too</a:t>
+            </a:r>
+          </a:p>
+        </p:txBody>
+      </p:sp>
+      <p:sp>
+        <p:nvSpPr>
+          <p:cNvPr id="14" name="TextBox 13"/>
+          <p:cNvSpPr txBox="1"/>
+          <p:nvPr/>
+        </p:nvSpPr>
+        <p:spPr>
+          <a:xfrm>
+            <a:off x="685800" y="4690871"/>
+            <a:ext cx="5029200" cy="960119"/>
           </a:xfrm>
           <a:prstGeom prst="rect">
             <a:avLst/>
@@ -6313,21 +6349,21 @@
                   <a:srgbClr val="334155"/>
                 </a:solidFill>
               </a:rPr>
-              <a:t>Every step you take is in the page address. Paste it to someone and they arrive exactly where you are.</a:t>
-            </a:r>
-          </a:p>
-        </p:txBody>
-      </p:sp>
-      <p:sp>
-        <p:nvSpPr>
-          <p:cNvPr id="14" name="Rectangle 13"/>
+              <a:t>A dashed line between two located things, labelled with what it is. A map of pins is a picture of coordinates.</a:t>
+            </a:r>
+          </a:p>
+        </p:txBody>
+      </p:sp>
+      <p:sp>
+        <p:nvSpPr>
+          <p:cNvPr id="15" name="Rectangle 14"/>
           <p:cNvSpPr/>
           <p:nvPr/>
         </p:nvSpPr>
         <p:spPr>
           <a:xfrm>
-            <a:off x="6217920" y="3886200"/>
-            <a:ext cx="5486400" cy="2148840"/>
+            <a:off x="6217920" y="4069079"/>
+            <a:ext cx="5486400" cy="1737360"/>
           </a:xfrm>
           <a:prstGeom prst="rect">
             <a:avLst/>
@@ -6363,13 +6399,13 @@
       </p:sp>
       <p:sp>
         <p:nvSpPr>
-          <p:cNvPr id="15" name="TextBox 14"/>
-          <p:cNvSpPr txBox="1"/>
-          <p:nvPr/>
-        </p:nvSpPr>
-        <p:spPr>
-          <a:xfrm>
-            <a:off x="6446520" y="4023360"/>
+          <p:cNvPr id="16" name="TextBox 15"/>
+          <p:cNvSpPr txBox="1"/>
+          <p:nvPr/>
+        </p:nvSpPr>
+        <p:spPr>
+          <a:xfrm>
+            <a:off x="6446520" y="4206240"/>
             <a:ext cx="5029200" cy="411480"/>
           </a:xfrm>
           <a:prstGeom prst="rect">
@@ -6387,24 +6423,24 @@
             <a:r>
               <a:rPr sz="1500" b="1" i="0">
                 <a:solidFill>
-                  <a:srgbClr val="0F766E"/>
-                </a:solidFill>
-              </a:rPr>
-              <a:t>Nothing is locked in</a:t>
-            </a:r>
-          </a:p>
-        </p:txBody>
-      </p:sp>
-      <p:sp>
-        <p:nvSpPr>
-          <p:cNvPr id="16" name="TextBox 15"/>
-          <p:cNvSpPr txBox="1"/>
-          <p:nvPr/>
-        </p:nvSpPr>
-        <p:spPr>
-          <a:xfrm>
-            <a:off x="6446520" y="4507992"/>
-            <a:ext cx="5029200" cy="1371600"/>
+                  <a:srgbClr val="166A34"/>
+                </a:solidFill>
+              </a:rPr>
+              <a:t>Nothing is hidden</a:t>
+            </a:r>
+          </a:p>
+        </p:txBody>
+      </p:sp>
+      <p:sp>
+        <p:nvSpPr>
+          <p:cNvPr id="17" name="TextBox 16"/>
+          <p:cNvSpPr txBox="1"/>
+          <p:nvPr/>
+        </p:nvSpPr>
+        <p:spPr>
+          <a:xfrm>
+            <a:off x="6446520" y="4690871"/>
+            <a:ext cx="5029200" cy="960119"/>
           </a:xfrm>
           <a:prstGeom prst="rect">
             <a:avLst/>
@@ -6423,7 +6459,41 @@
                   <a:srgbClr val="334155"/>
                 </a:solidFill>
               </a:rPr>
-              <a:t>Open source, CC BY 4.0. Your records stay yours, in files you can read, on machines you control.</a:t>
+              <a:t>The header says how many rows had no location, rather than quietly showing you a smaller world.</a:t>
+            </a:r>
+          </a:p>
+        </p:txBody>
+      </p:sp>
+      <p:sp>
+        <p:nvSpPr>
+          <p:cNvPr id="18" name="TextBox 17"/>
+          <p:cNvSpPr txBox="1"/>
+          <p:nvPr/>
+        </p:nvSpPr>
+        <p:spPr>
+          <a:xfrm>
+            <a:off x="457200" y="6035040"/>
+            <a:ext cx="11247120" cy="548640"/>
+          </a:xfrm>
+          <a:prstGeom prst="rect">
+            <a:avLst/>
+          </a:prstGeom>
+          <a:noFill/>
+        </p:spPr>
+        <p:txBody>
+          <a:bodyPr wrap="square">
+            <a:spAutoFit/>
+          </a:bodyPr>
+          <a:lstStyle/>
+          <a:p>
+            <a:pPr algn="l"/>
+            <a:r>
+              <a:rPr sz="1400" b="0" i="1">
+                <a:solidFill>
+                  <a:srgbClr val="475569"/>
+                </a:solidFill>
+              </a:rPr>
+              <a:t>Leo's NDC draws with lines to the four named areas that contain it — the town, the county, two watersheds. Nobody typed that in; it was worked out from the shapes.</a:t>
             </a:r>
           </a:p>
         </p:txBody>
@@ -6561,7 +6631,7 @@
                   <a:srgbClr val="FFFFFF"/>
                 </a:solidFill>
               </a:rPr>
-              <a:t>What it will not do</a:t>
+              <a:t>Where a point on the map came from</a:t>
             </a:r>
           </a:p>
         </p:txBody>
@@ -6574,8 +6644,8 @@
         </p:nvSpPr>
         <p:spPr>
           <a:xfrm>
-            <a:off x="457200" y="1371600"/>
-            <a:ext cx="5486400" cy="1783080"/>
+            <a:off x="457200" y="1554480"/>
+            <a:ext cx="11247120" cy="1005840"/>
           </a:xfrm>
           <a:prstGeom prst="rect">
             <a:avLst/>
@@ -6617,8 +6687,8 @@
         </p:nvSpPr>
         <p:spPr>
           <a:xfrm>
-            <a:off x="685800" y="1508760"/>
-            <a:ext cx="5029200" cy="411480"/>
+            <a:off x="640080" y="1609344"/>
+            <a:ext cx="3657600" cy="457200"/>
           </a:xfrm>
           <a:prstGeom prst="rect">
             <a:avLst/>
@@ -6633,12 +6703,12 @@
           <a:p>
             <a:pPr algn="l"/>
             <a:r>
-              <a:rPr sz="1500" b="1" i="0">
-                <a:solidFill>
-                  <a:srgbClr val="0F172A"/>
-                </a:solidFill>
-              </a:rPr>
-              <a:t>It does not change your records</a:t>
+              <a:rPr sz="1400" b="1" i="0">
+                <a:solidFill>
+                  <a:srgbClr val="166A34"/>
+                </a:solidFill>
+              </a:rPr>
+              <a:t>Some were surveyed</a:t>
             </a:r>
           </a:p>
         </p:txBody>
@@ -6651,27 +6721,28 @@
         </p:nvSpPr>
         <p:spPr>
           <a:xfrm>
-            <a:off x="685800" y="1993392"/>
-            <a:ext cx="5029200" cy="1005840"/>
-          </a:xfrm>
-          <a:prstGeom prst="rect">
-            <a:avLst/>
-          </a:prstGeom>
-          <a:noFill/>
-        </p:spPr>
-        <p:txBody>
-          <a:bodyPr wrap="square">
-            <a:spAutoFit/>
-          </a:bodyPr>
-          <a:lstStyle/>
-          <a:p>
-            <a:r>
-              <a:rPr sz="1300" b="0">
+            <a:off x="640080" y="2011680"/>
+            <a:ext cx="10789920" cy="502920"/>
+          </a:xfrm>
+          <a:prstGeom prst="rect">
+            <a:avLst/>
+          </a:prstGeom>
+          <a:noFill/>
+        </p:spPr>
+        <p:txBody>
+          <a:bodyPr wrap="square">
+            <a:spAutoFit/>
+          </a:bodyPr>
+          <a:lstStyle/>
+          <a:p>
+            <a:pPr algn="l"/>
+            <a:r>
+              <a:rPr sz="1300" b="0" i="0">
                 <a:solidFill>
                   <a:srgbClr val="334155"/>
                 </a:solidFill>
               </a:rPr>
-              <a:t>Sort, filter, select, follow. Nothing you do in the table can alter the underlying data.</a:t>
+              <a:t>The location was recorded with the rest of the information. That is the strongest kind.</a:t>
             </a:r>
           </a:p>
         </p:txBody>
@@ -6684,8 +6755,8 @@
         </p:nvSpPr>
         <p:spPr>
           <a:xfrm>
-            <a:off x="6217920" y="1371600"/>
-            <a:ext cx="5486400" cy="1783080"/>
+            <a:off x="457200" y="2697480"/>
+            <a:ext cx="11247120" cy="1005840"/>
           </a:xfrm>
           <a:prstGeom prst="rect">
             <a:avLst/>
@@ -6727,8 +6798,8 @@
         </p:nvSpPr>
         <p:spPr>
           <a:xfrm>
-            <a:off x="6446520" y="1508760"/>
-            <a:ext cx="5029200" cy="411480"/>
+            <a:off x="640080" y="2752344"/>
+            <a:ext cx="3657600" cy="457200"/>
           </a:xfrm>
           <a:prstGeom prst="rect">
             <a:avLst/>
@@ -6743,12 +6814,12 @@
           <a:p>
             <a:pPr algn="l"/>
             <a:r>
-              <a:rPr sz="1500" b="1" i="0">
-                <a:solidFill>
-                  <a:srgbClr val="0F172A"/>
-                </a:solidFill>
-              </a:rPr>
-              <a:t>It is not a spreadsheet</a:t>
+              <a:rPr sz="1400" b="1" i="0">
+                <a:solidFill>
+                  <a:srgbClr val="166A34"/>
+                </a:solidFill>
+              </a:rPr>
+              <a:t>Some came from an address</a:t>
             </a:r>
           </a:p>
         </p:txBody>
@@ -6761,27 +6832,28 @@
         </p:nvSpPr>
         <p:spPr>
           <a:xfrm>
-            <a:off x="6446520" y="1993392"/>
-            <a:ext cx="5029200" cy="1005840"/>
-          </a:xfrm>
-          <a:prstGeom prst="rect">
-            <a:avLst/>
-          </a:prstGeom>
-          <a:noFill/>
-        </p:spPr>
-        <p:txBody>
-          <a:bodyPr wrap="square">
-            <a:spAutoFit/>
-          </a:bodyPr>
-          <a:lstStyle/>
-          <a:p>
-            <a:r>
-              <a:rPr sz="1300" b="0">
+            <a:off x="640080" y="3154680"/>
+            <a:ext cx="10789920" cy="502920"/>
+          </a:xfrm>
+          <a:prstGeom prst="rect">
+            <a:avLst/>
+          </a:prstGeom>
+          <a:noFill/>
+        </p:spPr>
+        <p:txBody>
+          <a:bodyPr wrap="square">
+            <a:spAutoFit/>
+          </a:bodyPr>
+          <a:lstStyle/>
+          <a:p>
+            <a:pPr algn="l"/>
+            <a:r>
+              <a:rPr sz="1300" b="0" i="0">
                 <a:solidFill>
                   <a:srgbClr val="334155"/>
                 </a:solidFill>
               </a:rPr>
-              <a:t>Typing new information in is a different job, with different risks, kept deliberately somewhere else.</a:t>
+              <a:t>Worked out from the street address afterwards. The map records the address it asked about and what was found.</a:t>
             </a:r>
           </a:p>
         </p:txBody>
@@ -6794,8 +6866,8 @@
         </p:nvSpPr>
         <p:spPr>
           <a:xfrm>
-            <a:off x="457200" y="3429000"/>
-            <a:ext cx="5486400" cy="1783080"/>
+            <a:off x="457200" y="3840480"/>
+            <a:ext cx="11247120" cy="1005840"/>
           </a:xfrm>
           <a:prstGeom prst="rect">
             <a:avLst/>
@@ -6837,8 +6909,8 @@
         </p:nvSpPr>
         <p:spPr>
           <a:xfrm>
-            <a:off x="685800" y="3566160"/>
-            <a:ext cx="5029200" cy="411480"/>
+            <a:off x="640080" y="3895344"/>
+            <a:ext cx="3657600" cy="457200"/>
           </a:xfrm>
           <a:prstGeom prst="rect">
             <a:avLst/>
@@ -6853,12 +6925,12 @@
           <a:p>
             <a:pPr algn="l"/>
             <a:r>
-              <a:rPr sz="1500" b="1" i="0">
-                <a:solidFill>
-                  <a:srgbClr val="0F172A"/>
-                </a:solidFill>
-              </a:rPr>
-              <a:t>It will not guess</a:t>
+              <a:rPr sz="1400" b="1" i="0">
+                <a:solidFill>
+                  <a:srgbClr val="166A34"/>
+                </a:solidFill>
+              </a:rPr>
+              <a:t>Some have none at all</a:t>
             </a:r>
           </a:p>
         </p:txBody>
@@ -6871,27 +6943,28 @@
         </p:nvSpPr>
         <p:spPr>
           <a:xfrm>
-            <a:off x="685800" y="4050791"/>
-            <a:ext cx="5029200" cy="1005840"/>
-          </a:xfrm>
-          <a:prstGeom prst="rect">
-            <a:avLst/>
-          </a:prstGeom>
-          <a:noFill/>
-        </p:spPr>
-        <p:txBody>
-          <a:bodyPr wrap="square">
-            <a:spAutoFit/>
-          </a:bodyPr>
-          <a:lstStyle/>
-          <a:p>
-            <a:r>
-              <a:rPr sz="1300" b="0">
+            <a:off x="640080" y="4297680"/>
+            <a:ext cx="10789920" cy="502920"/>
+          </a:xfrm>
+          <a:prstGeom prst="rect">
+            <a:avLst/>
+          </a:prstGeom>
+          <a:noFill/>
+        </p:spPr>
+        <p:txBody>
+          <a:bodyPr wrap="square">
+            <a:spAutoFit/>
+          </a:bodyPr>
+          <a:lstStyle/>
+          <a:p>
+            <a:pPr algn="l"/>
+            <a:r>
+              <a:rPr sz="1300" b="0" i="0">
                 <a:solidFill>
                   <a:srgbClr val="334155"/>
                 </a:solidFill>
               </a:rPr>
-              <a:t>Empty stays empty. Two names that might be the same thing are reported to you, never quietly merged.</a:t>
+              <a:t>Of 42 organisations with an address, 27 were found and 15 were not — mostly clinics inside larger buildings.</a:t>
             </a:r>
           </a:p>
         </p:txBody>
@@ -6904,8 +6977,8 @@
         </p:nvSpPr>
         <p:spPr>
           <a:xfrm>
-            <a:off x="6217920" y="3429000"/>
-            <a:ext cx="5486400" cy="1783080"/>
+            <a:off x="457200" y="4983480"/>
+            <a:ext cx="11247120" cy="1005840"/>
           </a:xfrm>
           <a:prstGeom prst="rect">
             <a:avLst/>
@@ -6947,8 +7020,8 @@
         </p:nvSpPr>
         <p:spPr>
           <a:xfrm>
-            <a:off x="6446520" y="3566160"/>
-            <a:ext cx="5029200" cy="411480"/>
+            <a:off x="640080" y="5038344"/>
+            <a:ext cx="3657600" cy="457200"/>
           </a:xfrm>
           <a:prstGeom prst="rect">
             <a:avLst/>
@@ -6963,12 +7036,12 @@
           <a:p>
             <a:pPr algn="l"/>
             <a:r>
-              <a:rPr sz="1500" b="1" i="0">
-                <a:solidFill>
-                  <a:srgbClr val="0F172A"/>
-                </a:solidFill>
-              </a:rPr>
-              <a:t>It will not hide trouble</a:t>
+              <a:rPr sz="1400" b="1" i="0">
+                <a:solidFill>
+                  <a:srgbClr val="166A34"/>
+                </a:solidFill>
+              </a:rPr>
+              <a:t>The 15 are left empty</a:t>
             </a:r>
           </a:p>
         </p:txBody>
@@ -6981,41 +7054,180 @@
         </p:nvSpPr>
         <p:spPr>
           <a:xfrm>
-            <a:off x="6446520" y="4050791"/>
-            <a:ext cx="5029200" cy="1005840"/>
-          </a:xfrm>
-          <a:prstGeom prst="rect">
-            <a:avLst/>
-          </a:prstGeom>
-          <a:noFill/>
-        </p:spPr>
-        <p:txBody>
-          <a:bodyPr wrap="square">
-            <a:spAutoFit/>
-          </a:bodyPr>
-          <a:lstStyle/>
-          <a:p>
-            <a:r>
-              <a:rPr sz="1300" b="0">
+            <a:off x="640080" y="5440680"/>
+            <a:ext cx="10789920" cy="502920"/>
+          </a:xfrm>
+          <a:prstGeom prst="rect">
+            <a:avLst/>
+          </a:prstGeom>
+          <a:noFill/>
+        </p:spPr>
+        <p:txBody>
+          <a:bodyPr wrap="square">
+            <a:spAutoFit/>
+          </a:bodyPr>
+          <a:lstStyle/>
+          <a:p>
+            <a:pPr algn="l"/>
+            <a:r>
+              <a:rPr sz="1300" b="0" i="0">
                 <a:solidFill>
                   <a:srgbClr val="334155"/>
                 </a:solidFill>
               </a:rPr>
-              <a:t>If the records cannot be reached you get a message, not a blank screen pretending everything is fine.</a:t>
-            </a:r>
-          </a:p>
-        </p:txBody>
-      </p:sp>
-      <p:sp>
-        <p:nvSpPr>
-          <p:cNvPr id="17" name="Rectangle 16"/>
+              <a:t>No coordinate at all, rather than an approximate one. A point you cannot trust is worse than a gap you can see.</a:t>
+            </a:r>
+          </a:p>
+        </p:txBody>
+      </p:sp>
+    </p:spTree>
+  </p:cSld>
+  <p:clrMapOvr>
+    <a:masterClrMapping/>
+  </p:clrMapOvr>
+</p:sld>
+</file>
+
+<file path=ppt/slides/slide16.xml><?xml version="1.0" encoding="utf-8"?>
+<p:sld xmlns:a="http://schemas.openxmlformats.org/drawingml/2006/main" xmlns:p="http://schemas.openxmlformats.org/presentationml/2006/main" xmlns:r="http://schemas.openxmlformats.org/officeDocument/2006/relationships">
+  <p:cSld>
+    <p:spTree>
+      <p:nvGrpSpPr>
+        <p:cNvPr id="1" name=""/>
+        <p:cNvGrpSpPr/>
+        <p:nvPr/>
+      </p:nvGrpSpPr>
+      <p:grpSpPr/>
+      <p:sp>
+        <p:nvSpPr>
+          <p:cNvPr id="2" name="Rectangle 1"/>
           <p:cNvSpPr/>
           <p:nvPr/>
         </p:nvSpPr>
         <p:spPr>
           <a:xfrm>
-            <a:off x="457200" y="5440680"/>
-            <a:ext cx="11247120" cy="914400"/>
+            <a:off x="0" y="0"/>
+            <a:ext cx="12188952" cy="6858000"/>
+          </a:xfrm>
+          <a:prstGeom prst="rect">
+            <a:avLst/>
+          </a:prstGeom>
+          <a:solidFill>
+            <a:srgbClr val="F8FAFC"/>
+          </a:solidFill>
+          <a:ln>
+            <a:noFill/>
+          </a:ln>
+        </p:spPr>
+        <p:style>
+          <a:lnRef idx="1">
+            <a:schemeClr val="accent1"/>
+          </a:lnRef>
+          <a:fillRef idx="3">
+            <a:schemeClr val="accent1"/>
+          </a:fillRef>
+          <a:effectRef idx="2">
+            <a:schemeClr val="accent1"/>
+          </a:effectRef>
+          <a:fontRef idx="minor">
+            <a:schemeClr val="lt1"/>
+          </a:fontRef>
+        </p:style>
+        <p:txBody>
+          <a:bodyPr rtlCol="0" anchor="ctr"/>
+          <a:lstStyle/>
+          <a:p>
+            <a:pPr algn="ctr"/>
+          </a:p>
+        </p:txBody>
+      </p:sp>
+      <p:sp>
+        <p:nvSpPr>
+          <p:cNvPr id="3" name="Rectangle 2"/>
+          <p:cNvSpPr/>
+          <p:nvPr/>
+        </p:nvSpPr>
+        <p:spPr>
+          <a:xfrm>
+            <a:off x="0" y="0"/>
+            <a:ext cx="12188952" cy="1005840"/>
+          </a:xfrm>
+          <a:prstGeom prst="rect">
+            <a:avLst/>
+          </a:prstGeom>
+          <a:solidFill>
+            <a:srgbClr val="0F766E"/>
+          </a:solidFill>
+          <a:ln>
+            <a:noFill/>
+          </a:ln>
+        </p:spPr>
+        <p:style>
+          <a:lnRef idx="1">
+            <a:schemeClr val="accent1"/>
+          </a:lnRef>
+          <a:fillRef idx="3">
+            <a:schemeClr val="accent1"/>
+          </a:fillRef>
+          <a:effectRef idx="2">
+            <a:schemeClr val="accent1"/>
+          </a:effectRef>
+          <a:fontRef idx="minor">
+            <a:schemeClr val="lt1"/>
+          </a:fontRef>
+        </p:style>
+        <p:txBody>
+          <a:bodyPr rtlCol="0" anchor="ctr"/>
+          <a:lstStyle/>
+          <a:p>
+            <a:pPr algn="ctr"/>
+          </a:p>
+        </p:txBody>
+      </p:sp>
+      <p:sp>
+        <p:nvSpPr>
+          <p:cNvPr id="4" name="TextBox 3"/>
+          <p:cNvSpPr txBox="1"/>
+          <p:nvPr/>
+        </p:nvSpPr>
+        <p:spPr>
+          <a:xfrm>
+            <a:off x="457200" y="137160"/>
+            <a:ext cx="11247120" cy="731520"/>
+          </a:xfrm>
+          <a:prstGeom prst="rect">
+            <a:avLst/>
+          </a:prstGeom>
+          <a:noFill/>
+        </p:spPr>
+        <p:txBody>
+          <a:bodyPr wrap="square">
+            <a:spAutoFit/>
+          </a:bodyPr>
+          <a:lstStyle/>
+          <a:p>
+            <a:pPr algn="l"/>
+            <a:r>
+              <a:rPr sz="2800" b="1" i="0">
+                <a:solidFill>
+                  <a:srgbClr val="FFFFFF"/>
+                </a:solidFill>
+              </a:rPr>
+              <a:t>Taking it with you</a:t>
+            </a:r>
+          </a:p>
+        </p:txBody>
+      </p:sp>
+      <p:sp>
+        <p:nvSpPr>
+          <p:cNvPr id="5" name="Rectangle 4"/>
+          <p:cNvSpPr/>
+          <p:nvPr/>
+        </p:nvSpPr>
+        <p:spPr>
+          <a:xfrm>
+            <a:off x="457200" y="1463040"/>
+            <a:ext cx="5486400" cy="2148840"/>
           </a:xfrm>
           <a:prstGeom prst="rect">
             <a:avLst/>
@@ -7051,6 +7263,1024 @@
       </p:sp>
       <p:sp>
         <p:nvSpPr>
+          <p:cNvPr id="6" name="TextBox 5"/>
+          <p:cNvSpPr txBox="1"/>
+          <p:nvPr/>
+        </p:nvSpPr>
+        <p:spPr>
+          <a:xfrm>
+            <a:off x="685800" y="1600200"/>
+            <a:ext cx="5029200" cy="411480"/>
+          </a:xfrm>
+          <a:prstGeom prst="rect">
+            <a:avLst/>
+          </a:prstGeom>
+          <a:noFill/>
+        </p:spPr>
+        <p:txBody>
+          <a:bodyPr wrap="square">
+            <a:spAutoFit/>
+          </a:bodyPr>
+          <a:lstStyle/>
+          <a:p>
+            <a:pPr algn="l"/>
+            <a:r>
+              <a:rPr sz="1500" b="1" i="0">
+                <a:solidFill>
+                  <a:srgbClr val="0F766E"/>
+                </a:solidFill>
+              </a:rPr>
+              <a:t>CSV</a:t>
+            </a:r>
+          </a:p>
+        </p:txBody>
+      </p:sp>
+      <p:sp>
+        <p:nvSpPr>
+          <p:cNvPr id="7" name="TextBox 6"/>
+          <p:cNvSpPr txBox="1"/>
+          <p:nvPr/>
+        </p:nvSpPr>
+        <p:spPr>
+          <a:xfrm>
+            <a:off x="685800" y="2084832"/>
+            <a:ext cx="5029200" cy="1371600"/>
+          </a:xfrm>
+          <a:prstGeom prst="rect">
+            <a:avLst/>
+          </a:prstGeom>
+          <a:noFill/>
+        </p:spPr>
+        <p:txBody>
+          <a:bodyPr wrap="square">
+            <a:spAutoFit/>
+          </a:bodyPr>
+          <a:lstStyle/>
+          <a:p>
+            <a:r>
+              <a:rPr sz="1300" b="0">
+                <a:solidFill>
+                  <a:srgbClr val="334155"/>
+                </a:solidFill>
+              </a:rPr>
+              <a:t>Downloads what you can currently see — after filtering, in the order you sorted, with only the columns showing. Opens in any spreadsheet.</a:t>
+            </a:r>
+          </a:p>
+        </p:txBody>
+      </p:sp>
+      <p:sp>
+        <p:nvSpPr>
+          <p:cNvPr id="8" name="Rectangle 7"/>
+          <p:cNvSpPr/>
+          <p:nvPr/>
+        </p:nvSpPr>
+        <p:spPr>
+          <a:xfrm>
+            <a:off x="6217920" y="1463040"/>
+            <a:ext cx="5486400" cy="2148840"/>
+          </a:xfrm>
+          <a:prstGeom prst="rect">
+            <a:avLst/>
+          </a:prstGeom>
+          <a:solidFill>
+            <a:srgbClr val="FFFFFF"/>
+          </a:solidFill>
+          <a:ln>
+            <a:noFill/>
+          </a:ln>
+        </p:spPr>
+        <p:style>
+          <a:lnRef idx="1">
+            <a:schemeClr val="accent1"/>
+          </a:lnRef>
+          <a:fillRef idx="3">
+            <a:schemeClr val="accent1"/>
+          </a:fillRef>
+          <a:effectRef idx="2">
+            <a:schemeClr val="accent1"/>
+          </a:effectRef>
+          <a:fontRef idx="minor">
+            <a:schemeClr val="lt1"/>
+          </a:fontRef>
+        </p:style>
+        <p:txBody>
+          <a:bodyPr rtlCol="0" anchor="ctr"/>
+          <a:lstStyle/>
+          <a:p>
+            <a:pPr algn="ctr"/>
+          </a:p>
+        </p:txBody>
+      </p:sp>
+      <p:sp>
+        <p:nvSpPr>
+          <p:cNvPr id="9" name="TextBox 8"/>
+          <p:cNvSpPr txBox="1"/>
+          <p:nvPr/>
+        </p:nvSpPr>
+        <p:spPr>
+          <a:xfrm>
+            <a:off x="6446520" y="1600200"/>
+            <a:ext cx="5029200" cy="411480"/>
+          </a:xfrm>
+          <a:prstGeom prst="rect">
+            <a:avLst/>
+          </a:prstGeom>
+          <a:noFill/>
+        </p:spPr>
+        <p:txBody>
+          <a:bodyPr wrap="square">
+            <a:spAutoFit/>
+          </a:bodyPr>
+          <a:lstStyle/>
+          <a:p>
+            <a:pPr algn="l"/>
+            <a:r>
+              <a:rPr sz="1500" b="1" i="0">
+                <a:solidFill>
+                  <a:srgbClr val="0F766E"/>
+                </a:solidFill>
+              </a:rPr>
+              <a:t>Send to the page</a:t>
+            </a:r>
+          </a:p>
+        </p:txBody>
+      </p:sp>
+      <p:sp>
+        <p:nvSpPr>
+          <p:cNvPr id="10" name="TextBox 9"/>
+          <p:cNvSpPr txBox="1"/>
+          <p:nvPr/>
+        </p:nvSpPr>
+        <p:spPr>
+          <a:xfrm>
+            <a:off x="6446520" y="2084832"/>
+            <a:ext cx="5029200" cy="1371600"/>
+          </a:xfrm>
+          <a:prstGeom prst="rect">
+            <a:avLst/>
+          </a:prstGeom>
+          <a:noFill/>
+        </p:spPr>
+        <p:txBody>
+          <a:bodyPr wrap="square">
+            <a:spAutoFit/>
+          </a:bodyPr>
+          <a:lstStyle/>
+          <a:p>
+            <a:r>
+              <a:rPr sz="1300" b="0">
+                <a:solidFill>
+                  <a:srgbClr val="334155"/>
+                </a:solidFill>
+              </a:rPr>
+              <a:t>Puts the current view back on the wiki page as something others can read and follow. Carries up to 200 rows, and says the true total.</a:t>
+            </a:r>
+          </a:p>
+        </p:txBody>
+      </p:sp>
+      <p:sp>
+        <p:nvSpPr>
+          <p:cNvPr id="11" name="Rectangle 10"/>
+          <p:cNvSpPr/>
+          <p:nvPr/>
+        </p:nvSpPr>
+        <p:spPr>
+          <a:xfrm>
+            <a:off x="457200" y="3886200"/>
+            <a:ext cx="5486400" cy="2148840"/>
+          </a:xfrm>
+          <a:prstGeom prst="rect">
+            <a:avLst/>
+          </a:prstGeom>
+          <a:solidFill>
+            <a:srgbClr val="FFFFFF"/>
+          </a:solidFill>
+          <a:ln>
+            <a:noFill/>
+          </a:ln>
+        </p:spPr>
+        <p:style>
+          <a:lnRef idx="1">
+            <a:schemeClr val="accent1"/>
+          </a:lnRef>
+          <a:fillRef idx="3">
+            <a:schemeClr val="accent1"/>
+          </a:fillRef>
+          <a:effectRef idx="2">
+            <a:schemeClr val="accent1"/>
+          </a:effectRef>
+          <a:fontRef idx="minor">
+            <a:schemeClr val="lt1"/>
+          </a:fontRef>
+        </p:style>
+        <p:txBody>
+          <a:bodyPr rtlCol="0" anchor="ctr"/>
+          <a:lstStyle/>
+          <a:p>
+            <a:pPr algn="ctr"/>
+          </a:p>
+        </p:txBody>
+      </p:sp>
+      <p:sp>
+        <p:nvSpPr>
+          <p:cNvPr id="12" name="TextBox 11"/>
+          <p:cNvSpPr txBox="1"/>
+          <p:nvPr/>
+        </p:nvSpPr>
+        <p:spPr>
+          <a:xfrm>
+            <a:off x="685800" y="4023360"/>
+            <a:ext cx="5029200" cy="411480"/>
+          </a:xfrm>
+          <a:prstGeom prst="rect">
+            <a:avLst/>
+          </a:prstGeom>
+          <a:noFill/>
+        </p:spPr>
+        <p:txBody>
+          <a:bodyPr wrap="square">
+            <a:spAutoFit/>
+          </a:bodyPr>
+          <a:lstStyle/>
+          <a:p>
+            <a:pPr algn="l"/>
+            <a:r>
+              <a:rPr sz="1500" b="1" i="0">
+                <a:solidFill>
+                  <a:srgbClr val="0F766E"/>
+                </a:solidFill>
+              </a:rPr>
+              <a:t>The address bar</a:t>
+            </a:r>
+          </a:p>
+        </p:txBody>
+      </p:sp>
+      <p:sp>
+        <p:nvSpPr>
+          <p:cNvPr id="13" name="TextBox 12"/>
+          <p:cNvSpPr txBox="1"/>
+          <p:nvPr/>
+        </p:nvSpPr>
+        <p:spPr>
+          <a:xfrm>
+            <a:off x="685800" y="4507992"/>
+            <a:ext cx="5029200" cy="1371600"/>
+          </a:xfrm>
+          <a:prstGeom prst="rect">
+            <a:avLst/>
+          </a:prstGeom>
+          <a:noFill/>
+        </p:spPr>
+        <p:txBody>
+          <a:bodyPr wrap="square">
+            <a:spAutoFit/>
+          </a:bodyPr>
+          <a:lstStyle/>
+          <a:p>
+            <a:r>
+              <a:rPr sz="1300" b="0">
+                <a:solidFill>
+                  <a:srgbClr val="334155"/>
+                </a:solidFill>
+              </a:rPr>
+              <a:t>Every step you take is in the page address. Paste it to someone and they arrive exactly where you are.</a:t>
+            </a:r>
+          </a:p>
+        </p:txBody>
+      </p:sp>
+      <p:sp>
+        <p:nvSpPr>
+          <p:cNvPr id="14" name="Rectangle 13"/>
+          <p:cNvSpPr/>
+          <p:nvPr/>
+        </p:nvSpPr>
+        <p:spPr>
+          <a:xfrm>
+            <a:off x="6217920" y="3886200"/>
+            <a:ext cx="5486400" cy="2148840"/>
+          </a:xfrm>
+          <a:prstGeom prst="rect">
+            <a:avLst/>
+          </a:prstGeom>
+          <a:solidFill>
+            <a:srgbClr val="FFFFFF"/>
+          </a:solidFill>
+          <a:ln>
+            <a:noFill/>
+          </a:ln>
+        </p:spPr>
+        <p:style>
+          <a:lnRef idx="1">
+            <a:schemeClr val="accent1"/>
+          </a:lnRef>
+          <a:fillRef idx="3">
+            <a:schemeClr val="accent1"/>
+          </a:fillRef>
+          <a:effectRef idx="2">
+            <a:schemeClr val="accent1"/>
+          </a:effectRef>
+          <a:fontRef idx="minor">
+            <a:schemeClr val="lt1"/>
+          </a:fontRef>
+        </p:style>
+        <p:txBody>
+          <a:bodyPr rtlCol="0" anchor="ctr"/>
+          <a:lstStyle/>
+          <a:p>
+            <a:pPr algn="ctr"/>
+          </a:p>
+        </p:txBody>
+      </p:sp>
+      <p:sp>
+        <p:nvSpPr>
+          <p:cNvPr id="15" name="TextBox 14"/>
+          <p:cNvSpPr txBox="1"/>
+          <p:nvPr/>
+        </p:nvSpPr>
+        <p:spPr>
+          <a:xfrm>
+            <a:off x="6446520" y="4023360"/>
+            <a:ext cx="5029200" cy="411480"/>
+          </a:xfrm>
+          <a:prstGeom prst="rect">
+            <a:avLst/>
+          </a:prstGeom>
+          <a:noFill/>
+        </p:spPr>
+        <p:txBody>
+          <a:bodyPr wrap="square">
+            <a:spAutoFit/>
+          </a:bodyPr>
+          <a:lstStyle/>
+          <a:p>
+            <a:pPr algn="l"/>
+            <a:r>
+              <a:rPr sz="1500" b="1" i="0">
+                <a:solidFill>
+                  <a:srgbClr val="0F766E"/>
+                </a:solidFill>
+              </a:rPr>
+              <a:t>Nothing is locked in</a:t>
+            </a:r>
+          </a:p>
+        </p:txBody>
+      </p:sp>
+      <p:sp>
+        <p:nvSpPr>
+          <p:cNvPr id="16" name="TextBox 15"/>
+          <p:cNvSpPr txBox="1"/>
+          <p:nvPr/>
+        </p:nvSpPr>
+        <p:spPr>
+          <a:xfrm>
+            <a:off x="6446520" y="4507992"/>
+            <a:ext cx="5029200" cy="1371600"/>
+          </a:xfrm>
+          <a:prstGeom prst="rect">
+            <a:avLst/>
+          </a:prstGeom>
+          <a:noFill/>
+        </p:spPr>
+        <p:txBody>
+          <a:bodyPr wrap="square">
+            <a:spAutoFit/>
+          </a:bodyPr>
+          <a:lstStyle/>
+          <a:p>
+            <a:r>
+              <a:rPr sz="1300" b="0">
+                <a:solidFill>
+                  <a:srgbClr val="334155"/>
+                </a:solidFill>
+              </a:rPr>
+              <a:t>Open source, CC BY 4.0. Your records stay yours, in files you can read, on machines you control.</a:t>
+            </a:r>
+          </a:p>
+        </p:txBody>
+      </p:sp>
+    </p:spTree>
+  </p:cSld>
+  <p:clrMapOvr>
+    <a:masterClrMapping/>
+  </p:clrMapOvr>
+</p:sld>
+</file>
+
+<file path=ppt/slides/slide17.xml><?xml version="1.0" encoding="utf-8"?>
+<p:sld xmlns:a="http://schemas.openxmlformats.org/drawingml/2006/main" xmlns:p="http://schemas.openxmlformats.org/presentationml/2006/main" xmlns:r="http://schemas.openxmlformats.org/officeDocument/2006/relationships">
+  <p:cSld>
+    <p:spTree>
+      <p:nvGrpSpPr>
+        <p:cNvPr id="1" name=""/>
+        <p:cNvGrpSpPr/>
+        <p:nvPr/>
+      </p:nvGrpSpPr>
+      <p:grpSpPr/>
+      <p:sp>
+        <p:nvSpPr>
+          <p:cNvPr id="2" name="Rectangle 1"/>
+          <p:cNvSpPr/>
+          <p:nvPr/>
+        </p:nvSpPr>
+        <p:spPr>
+          <a:xfrm>
+            <a:off x="0" y="0"/>
+            <a:ext cx="12188952" cy="6858000"/>
+          </a:xfrm>
+          <a:prstGeom prst="rect">
+            <a:avLst/>
+          </a:prstGeom>
+          <a:solidFill>
+            <a:srgbClr val="F8FAFC"/>
+          </a:solidFill>
+          <a:ln>
+            <a:noFill/>
+          </a:ln>
+        </p:spPr>
+        <p:style>
+          <a:lnRef idx="1">
+            <a:schemeClr val="accent1"/>
+          </a:lnRef>
+          <a:fillRef idx="3">
+            <a:schemeClr val="accent1"/>
+          </a:fillRef>
+          <a:effectRef idx="2">
+            <a:schemeClr val="accent1"/>
+          </a:effectRef>
+          <a:fontRef idx="minor">
+            <a:schemeClr val="lt1"/>
+          </a:fontRef>
+        </p:style>
+        <p:txBody>
+          <a:bodyPr rtlCol="0" anchor="ctr"/>
+          <a:lstStyle/>
+          <a:p>
+            <a:pPr algn="ctr"/>
+          </a:p>
+        </p:txBody>
+      </p:sp>
+      <p:sp>
+        <p:nvSpPr>
+          <p:cNvPr id="3" name="Rectangle 2"/>
+          <p:cNvSpPr/>
+          <p:nvPr/>
+        </p:nvSpPr>
+        <p:spPr>
+          <a:xfrm>
+            <a:off x="0" y="0"/>
+            <a:ext cx="12188952" cy="1005840"/>
+          </a:xfrm>
+          <a:prstGeom prst="rect">
+            <a:avLst/>
+          </a:prstGeom>
+          <a:solidFill>
+            <a:srgbClr val="0F172A"/>
+          </a:solidFill>
+          <a:ln>
+            <a:noFill/>
+          </a:ln>
+        </p:spPr>
+        <p:style>
+          <a:lnRef idx="1">
+            <a:schemeClr val="accent1"/>
+          </a:lnRef>
+          <a:fillRef idx="3">
+            <a:schemeClr val="accent1"/>
+          </a:fillRef>
+          <a:effectRef idx="2">
+            <a:schemeClr val="accent1"/>
+          </a:effectRef>
+          <a:fontRef idx="minor">
+            <a:schemeClr val="lt1"/>
+          </a:fontRef>
+        </p:style>
+        <p:txBody>
+          <a:bodyPr rtlCol="0" anchor="ctr"/>
+          <a:lstStyle/>
+          <a:p>
+            <a:pPr algn="ctr"/>
+          </a:p>
+        </p:txBody>
+      </p:sp>
+      <p:sp>
+        <p:nvSpPr>
+          <p:cNvPr id="4" name="TextBox 3"/>
+          <p:cNvSpPr txBox="1"/>
+          <p:nvPr/>
+        </p:nvSpPr>
+        <p:spPr>
+          <a:xfrm>
+            <a:off x="457200" y="137160"/>
+            <a:ext cx="11247120" cy="731520"/>
+          </a:xfrm>
+          <a:prstGeom prst="rect">
+            <a:avLst/>
+          </a:prstGeom>
+          <a:noFill/>
+        </p:spPr>
+        <p:txBody>
+          <a:bodyPr wrap="square">
+            <a:spAutoFit/>
+          </a:bodyPr>
+          <a:lstStyle/>
+          <a:p>
+            <a:pPr algn="l"/>
+            <a:r>
+              <a:rPr sz="2800" b="1" i="0">
+                <a:solidFill>
+                  <a:srgbClr val="FFFFFF"/>
+                </a:solidFill>
+              </a:rPr>
+              <a:t>What it will not do</a:t>
+            </a:r>
+          </a:p>
+        </p:txBody>
+      </p:sp>
+      <p:sp>
+        <p:nvSpPr>
+          <p:cNvPr id="5" name="Rectangle 4"/>
+          <p:cNvSpPr/>
+          <p:nvPr/>
+        </p:nvSpPr>
+        <p:spPr>
+          <a:xfrm>
+            <a:off x="457200" y="1371600"/>
+            <a:ext cx="5486400" cy="1783080"/>
+          </a:xfrm>
+          <a:prstGeom prst="rect">
+            <a:avLst/>
+          </a:prstGeom>
+          <a:solidFill>
+            <a:srgbClr val="FFFFFF"/>
+          </a:solidFill>
+          <a:ln>
+            <a:noFill/>
+          </a:ln>
+        </p:spPr>
+        <p:style>
+          <a:lnRef idx="1">
+            <a:schemeClr val="accent1"/>
+          </a:lnRef>
+          <a:fillRef idx="3">
+            <a:schemeClr val="accent1"/>
+          </a:fillRef>
+          <a:effectRef idx="2">
+            <a:schemeClr val="accent1"/>
+          </a:effectRef>
+          <a:fontRef idx="minor">
+            <a:schemeClr val="lt1"/>
+          </a:fontRef>
+        </p:style>
+        <p:txBody>
+          <a:bodyPr rtlCol="0" anchor="ctr"/>
+          <a:lstStyle/>
+          <a:p>
+            <a:pPr algn="ctr"/>
+          </a:p>
+        </p:txBody>
+      </p:sp>
+      <p:sp>
+        <p:nvSpPr>
+          <p:cNvPr id="6" name="TextBox 5"/>
+          <p:cNvSpPr txBox="1"/>
+          <p:nvPr/>
+        </p:nvSpPr>
+        <p:spPr>
+          <a:xfrm>
+            <a:off x="685800" y="1508760"/>
+            <a:ext cx="5029200" cy="411480"/>
+          </a:xfrm>
+          <a:prstGeom prst="rect">
+            <a:avLst/>
+          </a:prstGeom>
+          <a:noFill/>
+        </p:spPr>
+        <p:txBody>
+          <a:bodyPr wrap="square">
+            <a:spAutoFit/>
+          </a:bodyPr>
+          <a:lstStyle/>
+          <a:p>
+            <a:pPr algn="l"/>
+            <a:r>
+              <a:rPr sz="1500" b="1" i="0">
+                <a:solidFill>
+                  <a:srgbClr val="0F172A"/>
+                </a:solidFill>
+              </a:rPr>
+              <a:t>It does not change your records</a:t>
+            </a:r>
+          </a:p>
+        </p:txBody>
+      </p:sp>
+      <p:sp>
+        <p:nvSpPr>
+          <p:cNvPr id="7" name="TextBox 6"/>
+          <p:cNvSpPr txBox="1"/>
+          <p:nvPr/>
+        </p:nvSpPr>
+        <p:spPr>
+          <a:xfrm>
+            <a:off x="685800" y="1993392"/>
+            <a:ext cx="5029200" cy="1005840"/>
+          </a:xfrm>
+          <a:prstGeom prst="rect">
+            <a:avLst/>
+          </a:prstGeom>
+          <a:noFill/>
+        </p:spPr>
+        <p:txBody>
+          <a:bodyPr wrap="square">
+            <a:spAutoFit/>
+          </a:bodyPr>
+          <a:lstStyle/>
+          <a:p>
+            <a:r>
+              <a:rPr sz="1300" b="0">
+                <a:solidFill>
+                  <a:srgbClr val="334155"/>
+                </a:solidFill>
+              </a:rPr>
+              <a:t>Sort, filter, select, follow. Nothing you do in the table can alter the underlying data.</a:t>
+            </a:r>
+          </a:p>
+        </p:txBody>
+      </p:sp>
+      <p:sp>
+        <p:nvSpPr>
+          <p:cNvPr id="8" name="Rectangle 7"/>
+          <p:cNvSpPr/>
+          <p:nvPr/>
+        </p:nvSpPr>
+        <p:spPr>
+          <a:xfrm>
+            <a:off x="6217920" y="1371600"/>
+            <a:ext cx="5486400" cy="1783080"/>
+          </a:xfrm>
+          <a:prstGeom prst="rect">
+            <a:avLst/>
+          </a:prstGeom>
+          <a:solidFill>
+            <a:srgbClr val="FFFFFF"/>
+          </a:solidFill>
+          <a:ln>
+            <a:noFill/>
+          </a:ln>
+        </p:spPr>
+        <p:style>
+          <a:lnRef idx="1">
+            <a:schemeClr val="accent1"/>
+          </a:lnRef>
+          <a:fillRef idx="3">
+            <a:schemeClr val="accent1"/>
+          </a:fillRef>
+          <a:effectRef idx="2">
+            <a:schemeClr val="accent1"/>
+          </a:effectRef>
+          <a:fontRef idx="minor">
+            <a:schemeClr val="lt1"/>
+          </a:fontRef>
+        </p:style>
+        <p:txBody>
+          <a:bodyPr rtlCol="0" anchor="ctr"/>
+          <a:lstStyle/>
+          <a:p>
+            <a:pPr algn="ctr"/>
+          </a:p>
+        </p:txBody>
+      </p:sp>
+      <p:sp>
+        <p:nvSpPr>
+          <p:cNvPr id="9" name="TextBox 8"/>
+          <p:cNvSpPr txBox="1"/>
+          <p:nvPr/>
+        </p:nvSpPr>
+        <p:spPr>
+          <a:xfrm>
+            <a:off x="6446520" y="1508760"/>
+            <a:ext cx="5029200" cy="411480"/>
+          </a:xfrm>
+          <a:prstGeom prst="rect">
+            <a:avLst/>
+          </a:prstGeom>
+          <a:noFill/>
+        </p:spPr>
+        <p:txBody>
+          <a:bodyPr wrap="square">
+            <a:spAutoFit/>
+          </a:bodyPr>
+          <a:lstStyle/>
+          <a:p>
+            <a:pPr algn="l"/>
+            <a:r>
+              <a:rPr sz="1500" b="1" i="0">
+                <a:solidFill>
+                  <a:srgbClr val="0F172A"/>
+                </a:solidFill>
+              </a:rPr>
+              <a:t>It is not a spreadsheet</a:t>
+            </a:r>
+          </a:p>
+        </p:txBody>
+      </p:sp>
+      <p:sp>
+        <p:nvSpPr>
+          <p:cNvPr id="10" name="TextBox 9"/>
+          <p:cNvSpPr txBox="1"/>
+          <p:nvPr/>
+        </p:nvSpPr>
+        <p:spPr>
+          <a:xfrm>
+            <a:off x="6446520" y="1993392"/>
+            <a:ext cx="5029200" cy="1005840"/>
+          </a:xfrm>
+          <a:prstGeom prst="rect">
+            <a:avLst/>
+          </a:prstGeom>
+          <a:noFill/>
+        </p:spPr>
+        <p:txBody>
+          <a:bodyPr wrap="square">
+            <a:spAutoFit/>
+          </a:bodyPr>
+          <a:lstStyle/>
+          <a:p>
+            <a:r>
+              <a:rPr sz="1300" b="0">
+                <a:solidFill>
+                  <a:srgbClr val="334155"/>
+                </a:solidFill>
+              </a:rPr>
+              <a:t>Typing new information in is a different job, with different risks, kept deliberately somewhere else.</a:t>
+            </a:r>
+          </a:p>
+        </p:txBody>
+      </p:sp>
+      <p:sp>
+        <p:nvSpPr>
+          <p:cNvPr id="11" name="Rectangle 10"/>
+          <p:cNvSpPr/>
+          <p:nvPr/>
+        </p:nvSpPr>
+        <p:spPr>
+          <a:xfrm>
+            <a:off x="457200" y="3429000"/>
+            <a:ext cx="5486400" cy="1783080"/>
+          </a:xfrm>
+          <a:prstGeom prst="rect">
+            <a:avLst/>
+          </a:prstGeom>
+          <a:solidFill>
+            <a:srgbClr val="FFFFFF"/>
+          </a:solidFill>
+          <a:ln>
+            <a:noFill/>
+          </a:ln>
+        </p:spPr>
+        <p:style>
+          <a:lnRef idx="1">
+            <a:schemeClr val="accent1"/>
+          </a:lnRef>
+          <a:fillRef idx="3">
+            <a:schemeClr val="accent1"/>
+          </a:fillRef>
+          <a:effectRef idx="2">
+            <a:schemeClr val="accent1"/>
+          </a:effectRef>
+          <a:fontRef idx="minor">
+            <a:schemeClr val="lt1"/>
+          </a:fontRef>
+        </p:style>
+        <p:txBody>
+          <a:bodyPr rtlCol="0" anchor="ctr"/>
+          <a:lstStyle/>
+          <a:p>
+            <a:pPr algn="ctr"/>
+          </a:p>
+        </p:txBody>
+      </p:sp>
+      <p:sp>
+        <p:nvSpPr>
+          <p:cNvPr id="12" name="TextBox 11"/>
+          <p:cNvSpPr txBox="1"/>
+          <p:nvPr/>
+        </p:nvSpPr>
+        <p:spPr>
+          <a:xfrm>
+            <a:off x="685800" y="3566160"/>
+            <a:ext cx="5029200" cy="411480"/>
+          </a:xfrm>
+          <a:prstGeom prst="rect">
+            <a:avLst/>
+          </a:prstGeom>
+          <a:noFill/>
+        </p:spPr>
+        <p:txBody>
+          <a:bodyPr wrap="square">
+            <a:spAutoFit/>
+          </a:bodyPr>
+          <a:lstStyle/>
+          <a:p>
+            <a:pPr algn="l"/>
+            <a:r>
+              <a:rPr sz="1500" b="1" i="0">
+                <a:solidFill>
+                  <a:srgbClr val="0F172A"/>
+                </a:solidFill>
+              </a:rPr>
+              <a:t>It will not guess</a:t>
+            </a:r>
+          </a:p>
+        </p:txBody>
+      </p:sp>
+      <p:sp>
+        <p:nvSpPr>
+          <p:cNvPr id="13" name="TextBox 12"/>
+          <p:cNvSpPr txBox="1"/>
+          <p:nvPr/>
+        </p:nvSpPr>
+        <p:spPr>
+          <a:xfrm>
+            <a:off x="685800" y="4050791"/>
+            <a:ext cx="5029200" cy="1005840"/>
+          </a:xfrm>
+          <a:prstGeom prst="rect">
+            <a:avLst/>
+          </a:prstGeom>
+          <a:noFill/>
+        </p:spPr>
+        <p:txBody>
+          <a:bodyPr wrap="square">
+            <a:spAutoFit/>
+          </a:bodyPr>
+          <a:lstStyle/>
+          <a:p>
+            <a:r>
+              <a:rPr sz="1300" b="0">
+                <a:solidFill>
+                  <a:srgbClr val="334155"/>
+                </a:solidFill>
+              </a:rPr>
+              <a:t>Empty stays empty. Two names that might be the same thing are reported to you, never quietly merged.</a:t>
+            </a:r>
+          </a:p>
+        </p:txBody>
+      </p:sp>
+      <p:sp>
+        <p:nvSpPr>
+          <p:cNvPr id="14" name="Rectangle 13"/>
+          <p:cNvSpPr/>
+          <p:nvPr/>
+        </p:nvSpPr>
+        <p:spPr>
+          <a:xfrm>
+            <a:off x="6217920" y="3429000"/>
+            <a:ext cx="5486400" cy="1783080"/>
+          </a:xfrm>
+          <a:prstGeom prst="rect">
+            <a:avLst/>
+          </a:prstGeom>
+          <a:solidFill>
+            <a:srgbClr val="FFFFFF"/>
+          </a:solidFill>
+          <a:ln>
+            <a:noFill/>
+          </a:ln>
+        </p:spPr>
+        <p:style>
+          <a:lnRef idx="1">
+            <a:schemeClr val="accent1"/>
+          </a:lnRef>
+          <a:fillRef idx="3">
+            <a:schemeClr val="accent1"/>
+          </a:fillRef>
+          <a:effectRef idx="2">
+            <a:schemeClr val="accent1"/>
+          </a:effectRef>
+          <a:fontRef idx="minor">
+            <a:schemeClr val="lt1"/>
+          </a:fontRef>
+        </p:style>
+        <p:txBody>
+          <a:bodyPr rtlCol="0" anchor="ctr"/>
+          <a:lstStyle/>
+          <a:p>
+            <a:pPr algn="ctr"/>
+          </a:p>
+        </p:txBody>
+      </p:sp>
+      <p:sp>
+        <p:nvSpPr>
+          <p:cNvPr id="15" name="TextBox 14"/>
+          <p:cNvSpPr txBox="1"/>
+          <p:nvPr/>
+        </p:nvSpPr>
+        <p:spPr>
+          <a:xfrm>
+            <a:off x="6446520" y="3566160"/>
+            <a:ext cx="5029200" cy="411480"/>
+          </a:xfrm>
+          <a:prstGeom prst="rect">
+            <a:avLst/>
+          </a:prstGeom>
+          <a:noFill/>
+        </p:spPr>
+        <p:txBody>
+          <a:bodyPr wrap="square">
+            <a:spAutoFit/>
+          </a:bodyPr>
+          <a:lstStyle/>
+          <a:p>
+            <a:pPr algn="l"/>
+            <a:r>
+              <a:rPr sz="1500" b="1" i="0">
+                <a:solidFill>
+                  <a:srgbClr val="0F172A"/>
+                </a:solidFill>
+              </a:rPr>
+              <a:t>It will not hide trouble</a:t>
+            </a:r>
+          </a:p>
+        </p:txBody>
+      </p:sp>
+      <p:sp>
+        <p:nvSpPr>
+          <p:cNvPr id="16" name="TextBox 15"/>
+          <p:cNvSpPr txBox="1"/>
+          <p:nvPr/>
+        </p:nvSpPr>
+        <p:spPr>
+          <a:xfrm>
+            <a:off x="6446520" y="4050791"/>
+            <a:ext cx="5029200" cy="1005840"/>
+          </a:xfrm>
+          <a:prstGeom prst="rect">
+            <a:avLst/>
+          </a:prstGeom>
+          <a:noFill/>
+        </p:spPr>
+        <p:txBody>
+          <a:bodyPr wrap="square">
+            <a:spAutoFit/>
+          </a:bodyPr>
+          <a:lstStyle/>
+          <a:p>
+            <a:r>
+              <a:rPr sz="1300" b="0">
+                <a:solidFill>
+                  <a:srgbClr val="334155"/>
+                </a:solidFill>
+              </a:rPr>
+              <a:t>If the records cannot be reached you get a message, not a blank screen pretending everything is fine.</a:t>
+            </a:r>
+          </a:p>
+        </p:txBody>
+      </p:sp>
+      <p:sp>
+        <p:nvSpPr>
+          <p:cNvPr id="17" name="Rectangle 16"/>
+          <p:cNvSpPr/>
+          <p:nvPr/>
+        </p:nvSpPr>
+        <p:spPr>
+          <a:xfrm>
+            <a:off x="457200" y="5440680"/>
+            <a:ext cx="11247120" cy="914400"/>
+          </a:xfrm>
+          <a:prstGeom prst="rect">
+            <a:avLst/>
+          </a:prstGeom>
+          <a:solidFill>
+            <a:srgbClr val="FFFFFF"/>
+          </a:solidFill>
+          <a:ln>
+            <a:noFill/>
+          </a:ln>
+        </p:spPr>
+        <p:style>
+          <a:lnRef idx="1">
+            <a:schemeClr val="accent1"/>
+          </a:lnRef>
+          <a:fillRef idx="3">
+            <a:schemeClr val="accent1"/>
+          </a:fillRef>
+          <a:effectRef idx="2">
+            <a:schemeClr val="accent1"/>
+          </a:effectRef>
+          <a:fontRef idx="minor">
+            <a:schemeClr val="lt1"/>
+          </a:fontRef>
+        </p:style>
+        <p:txBody>
+          <a:bodyPr rtlCol="0" anchor="ctr"/>
+          <a:lstStyle/>
+          <a:p>
+            <a:pPr algn="ctr"/>
+          </a:p>
+        </p:txBody>
+      </p:sp>
+      <p:sp>
+        <p:nvSpPr>
           <p:cNvPr id="18" name="TextBox 17"/>
           <p:cNvSpPr txBox="1"/>
           <p:nvPr/>
@@ -7078,7 +8308,7 @@
                   <a:srgbClr val="0F766E"/>
                 </a:solidFill>
               </a:rPr>
-              <a:t>Start here:  open the table, sort a column, click a row, press Neighbourhood.</a:t>
+              <a:t>Start here:  open the table, sort a column, click a row — then Neighbourhood, or Map.</a:t>
             </a:r>
           </a:p>
         </p:txBody>
@@ -8756,7 +9986,7 @@
             <a:avLst/>
           </a:prstGeom>
           <a:solidFill>
-            <a:srgbClr val="6B21A8"/>
+            <a:srgbClr val="166A34"/>
           </a:solidFill>
           <a:ln>
             <a:noFill/>
@@ -8818,10 +10048,10 @@
             <a:r>
               <a:rPr sz="1500" b="1" i="0">
                 <a:solidFill>
-                  <a:srgbClr val="6B21A8"/>
-                </a:solidFill>
-              </a:rPr>
-              <a:t>Grow</a:t>
+                  <a:srgbClr val="166A34"/>
+                </a:solidFill>
+              </a:rPr>
+              <a:t>Or place it</a:t>
             </a:r>
           </a:p>
         </p:txBody>
@@ -8854,7 +10084,7 @@
                   <a:srgbClr val="334155"/>
                 </a:solidFill>
               </a:rPr>
-              <a:t>Press Expand on anything in the drawing. One more hop arrives.</a:t>
+              <a:t>Press Map instead and the same rows appear on the ground.</a:t>
             </a:r>
           </a:p>
         </p:txBody>

--- a/tools/rcn-table-intro.pptx
+++ b/tools/rcn-table-intro.pptx
@@ -6644,7 +6644,7 @@
         </p:nvSpPr>
         <p:spPr>
           <a:xfrm>
-            <a:off x="457200" y="1554480"/>
+            <a:off x="457200" y="1417320"/>
             <a:ext cx="11247120" cy="1005840"/>
           </a:xfrm>
           <a:prstGeom prst="rect">
@@ -6687,8 +6687,8 @@
         </p:nvSpPr>
         <p:spPr>
           <a:xfrm>
-            <a:off x="640080" y="1609344"/>
-            <a:ext cx="3657600" cy="457200"/>
+            <a:off x="640080" y="1472184"/>
+            <a:ext cx="4206240" cy="457200"/>
           </a:xfrm>
           <a:prstGeom prst="rect">
             <a:avLst/>
@@ -6721,7 +6721,7 @@
         </p:nvSpPr>
         <p:spPr>
           <a:xfrm>
-            <a:off x="640080" y="2011680"/>
+            <a:off x="640080" y="1874519"/>
             <a:ext cx="10789920" cy="502920"/>
           </a:xfrm>
           <a:prstGeom prst="rect">
@@ -6755,7 +6755,7 @@
         </p:nvSpPr>
         <p:spPr>
           <a:xfrm>
-            <a:off x="457200" y="2697480"/>
+            <a:off x="457200" y="2478024"/>
             <a:ext cx="11247120" cy="1005840"/>
           </a:xfrm>
           <a:prstGeom prst="rect">
@@ -6798,8 +6798,8 @@
         </p:nvSpPr>
         <p:spPr>
           <a:xfrm>
-            <a:off x="640080" y="2752344"/>
-            <a:ext cx="3657600" cy="457200"/>
+            <a:off x="640080" y="2532888"/>
+            <a:ext cx="4206240" cy="457200"/>
           </a:xfrm>
           <a:prstGeom prst="rect">
             <a:avLst/>
@@ -6832,7 +6832,7 @@
         </p:nvSpPr>
         <p:spPr>
           <a:xfrm>
-            <a:off x="640080" y="3154680"/>
+            <a:off x="640080" y="2935224"/>
             <a:ext cx="10789920" cy="502920"/>
           </a:xfrm>
           <a:prstGeom prst="rect">
@@ -6866,7 +6866,7 @@
         </p:nvSpPr>
         <p:spPr>
           <a:xfrm>
-            <a:off x="457200" y="3840480"/>
+            <a:off x="457200" y="3538728"/>
             <a:ext cx="11247120" cy="1005840"/>
           </a:xfrm>
           <a:prstGeom prst="rect">
@@ -6909,8 +6909,8 @@
         </p:nvSpPr>
         <p:spPr>
           <a:xfrm>
-            <a:off x="640080" y="3895344"/>
-            <a:ext cx="3657600" cy="457200"/>
+            <a:off x="640080" y="3593592"/>
+            <a:ext cx="4206240" cy="457200"/>
           </a:xfrm>
           <a:prstGeom prst="rect">
             <a:avLst/>
@@ -6930,7 +6930,7 @@
                   <a:srgbClr val="166A34"/>
                 </a:solidFill>
               </a:rPr>
-              <a:t>Some have none at all</a:t>
+              <a:t>Most name a room, not a building</a:t>
             </a:r>
           </a:p>
         </p:txBody>
@@ -6943,7 +6943,7 @@
         </p:nvSpPr>
         <p:spPr>
           <a:xfrm>
-            <a:off x="640080" y="4297680"/>
+            <a:off x="640080" y="3995928"/>
             <a:ext cx="10789920" cy="502920"/>
           </a:xfrm>
           <a:prstGeom prst="rect">
@@ -6964,7 +6964,7 @@
                   <a:srgbClr val="334155"/>
                 </a:solidFill>
               </a:rPr>
-              <a:t>Of 42 organisations with an address, 27 were found and 15 were not — mostly clinics inside larger buildings.</a:t>
+              <a:t>Suite 204. #D-1. Ste 102. Those are looked up without the suite, which finds the building.</a:t>
             </a:r>
           </a:p>
         </p:txBody>
@@ -6977,7 +6977,7 @@
         </p:nvSpPr>
         <p:spPr>
           <a:xfrm>
-            <a:off x="457200" y="4983480"/>
+            <a:off x="457200" y="4599431"/>
             <a:ext cx="11247120" cy="1005840"/>
           </a:xfrm>
           <a:prstGeom prst="rect">
@@ -7020,8 +7020,8 @@
         </p:nvSpPr>
         <p:spPr>
           <a:xfrm>
-            <a:off x="640080" y="5038344"/>
-            <a:ext cx="3657600" cy="457200"/>
+            <a:off x="640080" y="4654295"/>
+            <a:ext cx="4206240" cy="457200"/>
           </a:xfrm>
           <a:prstGeom prst="rect">
             <a:avLst/>
@@ -7041,7 +7041,7 @@
                   <a:srgbClr val="166A34"/>
                 </a:solidFill>
               </a:rPr>
-              <a:t>The 15 are left empty</a:t>
+              <a:t>Every result is checked</a:t>
             </a:r>
           </a:p>
         </p:txBody>
@@ -7054,7 +7054,7 @@
         </p:nvSpPr>
         <p:spPr>
           <a:xfrm>
-            <a:off x="640080" y="5440680"/>
+            <a:off x="640080" y="5056631"/>
             <a:ext cx="10789920" cy="502920"/>
           </a:xfrm>
           <a:prstGeom prst="rect">
@@ -7075,7 +7075,118 @@
                   <a:srgbClr val="334155"/>
                 </a:solidFill>
               </a:rPr>
-              <a:t>No coordinate at all, rather than an approximate one. A point you cannot trust is worse than a gap you can see.</a:t>
+              <a:t>A wrong answer looks exactly like a right one. Asking for a Lynden street returned the same street in Seattle, 145km away.</a:t>
+            </a:r>
+          </a:p>
+        </p:txBody>
+      </p:sp>
+      <p:sp>
+        <p:nvSpPr>
+          <p:cNvPr id="17" name="Rectangle 16"/>
+          <p:cNvSpPr/>
+          <p:nvPr/>
+        </p:nvSpPr>
+        <p:spPr>
+          <a:xfrm>
+            <a:off x="457200" y="5660136"/>
+            <a:ext cx="11247120" cy="1005840"/>
+          </a:xfrm>
+          <a:prstGeom prst="rect">
+            <a:avLst/>
+          </a:prstGeom>
+          <a:solidFill>
+            <a:srgbClr val="FFFFFF"/>
+          </a:solidFill>
+          <a:ln>
+            <a:noFill/>
+          </a:ln>
+        </p:spPr>
+        <p:style>
+          <a:lnRef idx="1">
+            <a:schemeClr val="accent1"/>
+          </a:lnRef>
+          <a:fillRef idx="3">
+            <a:schemeClr val="accent1"/>
+          </a:fillRef>
+          <a:effectRef idx="2">
+            <a:schemeClr val="accent1"/>
+          </a:effectRef>
+          <a:fontRef idx="minor">
+            <a:schemeClr val="lt1"/>
+          </a:fontRef>
+        </p:style>
+        <p:txBody>
+          <a:bodyPr rtlCol="0" anchor="ctr"/>
+          <a:lstStyle/>
+          <a:p>
+            <a:pPr algn="ctr"/>
+          </a:p>
+        </p:txBody>
+      </p:sp>
+      <p:sp>
+        <p:nvSpPr>
+          <p:cNvPr id="18" name="TextBox 17"/>
+          <p:cNvSpPr txBox="1"/>
+          <p:nvPr/>
+        </p:nvSpPr>
+        <p:spPr>
+          <a:xfrm>
+            <a:off x="640080" y="5714999"/>
+            <a:ext cx="4206240" cy="457200"/>
+          </a:xfrm>
+          <a:prstGeom prst="rect">
+            <a:avLst/>
+          </a:prstGeom>
+          <a:noFill/>
+        </p:spPr>
+        <p:txBody>
+          <a:bodyPr wrap="square">
+            <a:spAutoFit/>
+          </a:bodyPr>
+          <a:lstStyle/>
+          <a:p>
+            <a:pPr algn="l"/>
+            <a:r>
+              <a:rPr sz="1400" b="1" i="0">
+                <a:solidFill>
+                  <a:srgbClr val="166A34"/>
+                </a:solidFill>
+              </a:rPr>
+              <a:t>39 of 42 found, 3 left empty</a:t>
+            </a:r>
+          </a:p>
+        </p:txBody>
+      </p:sp>
+      <p:sp>
+        <p:nvSpPr>
+          <p:cNvPr id="19" name="TextBox 18"/>
+          <p:cNvSpPr txBox="1"/>
+          <p:nvPr/>
+        </p:nvSpPr>
+        <p:spPr>
+          <a:xfrm>
+            <a:off x="640080" y="6117336"/>
+            <a:ext cx="10789920" cy="502920"/>
+          </a:xfrm>
+          <a:prstGeom prst="rect">
+            <a:avLst/>
+          </a:prstGeom>
+          <a:noFill/>
+        </p:spPr>
+        <p:txBody>
+          <a:bodyPr wrap="square">
+            <a:spAutoFit/>
+          </a:bodyPr>
+          <a:lstStyle/>
+          <a:p>
+            <a:pPr algn="l"/>
+            <a:r>
+              <a:rPr sz="1300" b="0" i="0">
+                <a:solidFill>
+                  <a:srgbClr val="334155"/>
+                </a:solidFill>
+              </a:rPr>
+              <a:t>No coordinate at all rather than an approximate one. A point you cannot trust is worse than a gap you can see.</a:t>
             </a:r>
           </a:p>
         </p:txBody>
